--- a/exports/pptx/lessons/middle-module-02-panchabhuta/day-10-final-assessment.pptx
+++ b/exports/pptx/lessons/middle-module-02-panchabhuta/day-10-final-assessment.pptx
@@ -16,9 +16,11 @@
     <p:sldId id="264" r:id="rId10"/>
     <p:sldId id="265" r:id="rId11"/>
     <p:sldId id="266" r:id="rId12"/>
+    <p:sldId id="267" r:id="rId13"/>
+    <p:sldId id="268" r:id="rId14"/>
   </p:sldIdLst>
   <p:notesMasterIdLst>
-    <p:notesMasterId r:id="rId13"/>
+    <p:notesMasterId r:id="rId15"/>
   </p:notesMasterIdLst>
   <p:sldSz cx="9144000" cy="5143500"/>
   <p:notesSz cx="5143500" cy="9144000"/>
@@ -712,6 +714,182 @@
             <a:fld id="{F7021451-1387-4CA6-816F-3879F97B5CBC}" type="slidenum">
               <a:rPr lang="en-US"/>
               <a:t>11</a:t>
+            </a:fld>
+            <a:endParaRPr lang="en-US"/>
+          </a:p>
+        </p:txBody>
+      </p:sp>
+    </p:spTree>
+    <p:extLst>
+      <p:ext uri="{BB962C8B-B14F-4D97-AF65-F5344CB8AC3E}">
+        <p14:creationId xmlns:p14="http://schemas.microsoft.com/office/powerpoint/2010/main" val="1024086991"/>
+      </p:ext>
+    </p:extLst>
+  </p:cSld>
+  <p:clrMapOvr>
+    <a:masterClrMapping/>
+  </p:clrMapOvr>
+</p:notes>
+</file>
+
+<file path=ppt/notesSlides/notesSlide12.xml><?xml version="1.0" encoding="utf-8"?>
+<p:notes xmlns:a="http://schemas.openxmlformats.org/drawingml/2006/main" xmlns:r="http://schemas.openxmlformats.org/officeDocument/2006/relationships" xmlns:p="http://schemas.openxmlformats.org/presentationml/2006/main">
+  <p:cSld>
+    <p:spTree>
+      <p:nvGrpSpPr>
+        <p:cNvPr id="1" name=""/>
+        <p:cNvGrpSpPr/>
+        <p:nvPr/>
+      </p:nvGrpSpPr>
+      <p:grpSpPr>
+        <a:xfrm>
+          <a:off x="0" y="0"/>
+          <a:ext cx="0" cy="0"/>
+          <a:chOff x="0" y="0"/>
+          <a:chExt cx="0" cy="0"/>
+        </a:xfrm>
+      </p:grpSpPr>
+      <p:sp>
+        <p:nvSpPr>
+          <p:cNvPr id="2" name="Slide Image Placeholder 1"/>
+          <p:cNvSpPr>
+            <a:spLocks noGrp="1" noRot="1" noChangeAspect="1"/>
+          </p:cNvSpPr>
+          <p:nvPr>
+            <p:ph type="sldImg"/>
+          </p:nvPr>
+        </p:nvSpPr>
+        <p:spPr/>
+      </p:sp>
+      <p:sp>
+        <p:nvSpPr>
+          <p:cNvPr id="3" name="Notes Placeholder 2"/>
+          <p:cNvSpPr>
+            <a:spLocks noGrp="1"/>
+          </p:cNvSpPr>
+          <p:nvPr>
+            <p:ph type="body" idx="1"/>
+          </p:nvPr>
+        </p:nvSpPr>
+        <p:spPr/>
+        <p:txBody>
+          <a:bodyPr/>
+          <a:lstStyle/>
+          <a:p>
+            <a:r>
+              <a:rPr lang="en-US" dirty="0"/>
+              <a:t/>
+            </a:r>
+            <a:endParaRPr lang="en-US" dirty="0"/>
+          </a:p>
+        </p:txBody>
+      </p:sp>
+      <p:sp>
+        <p:nvSpPr>
+          <p:cNvPr id="4" name="Slide Number Placeholder 3"/>
+          <p:cNvSpPr>
+            <a:spLocks noGrp="1"/>
+          </p:cNvSpPr>
+          <p:nvPr>
+            <p:ph type="sldNum" sz="quarter" idx="10"/>
+          </p:nvPr>
+        </p:nvSpPr>
+        <p:spPr/>
+        <p:txBody>
+          <a:bodyPr/>
+          <a:lstStyle/>
+          <a:p>
+            <a:fld id="{F7021451-1387-4CA6-816F-3879F97B5CBC}" type="slidenum">
+              <a:rPr lang="en-US"/>
+              <a:t>12</a:t>
+            </a:fld>
+            <a:endParaRPr lang="en-US"/>
+          </a:p>
+        </p:txBody>
+      </p:sp>
+    </p:spTree>
+    <p:extLst>
+      <p:ext uri="{BB962C8B-B14F-4D97-AF65-F5344CB8AC3E}">
+        <p14:creationId xmlns:p14="http://schemas.microsoft.com/office/powerpoint/2010/main" val="1024086991"/>
+      </p:ext>
+    </p:extLst>
+  </p:cSld>
+  <p:clrMapOvr>
+    <a:masterClrMapping/>
+  </p:clrMapOvr>
+</p:notes>
+</file>
+
+<file path=ppt/notesSlides/notesSlide13.xml><?xml version="1.0" encoding="utf-8"?>
+<p:notes xmlns:a="http://schemas.openxmlformats.org/drawingml/2006/main" xmlns:r="http://schemas.openxmlformats.org/officeDocument/2006/relationships" xmlns:p="http://schemas.openxmlformats.org/presentationml/2006/main">
+  <p:cSld>
+    <p:spTree>
+      <p:nvGrpSpPr>
+        <p:cNvPr id="1" name=""/>
+        <p:cNvGrpSpPr/>
+        <p:nvPr/>
+      </p:nvGrpSpPr>
+      <p:grpSpPr>
+        <a:xfrm>
+          <a:off x="0" y="0"/>
+          <a:ext cx="0" cy="0"/>
+          <a:chOff x="0" y="0"/>
+          <a:chExt cx="0" cy="0"/>
+        </a:xfrm>
+      </p:grpSpPr>
+      <p:sp>
+        <p:nvSpPr>
+          <p:cNvPr id="2" name="Slide Image Placeholder 1"/>
+          <p:cNvSpPr>
+            <a:spLocks noGrp="1" noRot="1" noChangeAspect="1"/>
+          </p:cNvSpPr>
+          <p:nvPr>
+            <p:ph type="sldImg"/>
+          </p:nvPr>
+        </p:nvSpPr>
+        <p:spPr/>
+      </p:sp>
+      <p:sp>
+        <p:nvSpPr>
+          <p:cNvPr id="3" name="Notes Placeholder 2"/>
+          <p:cNvSpPr>
+            <a:spLocks noGrp="1"/>
+          </p:cNvSpPr>
+          <p:nvPr>
+            <p:ph type="body" idx="1"/>
+          </p:nvPr>
+        </p:nvSpPr>
+        <p:spPr/>
+        <p:txBody>
+          <a:bodyPr/>
+          <a:lstStyle/>
+          <a:p>
+            <a:r>
+              <a:rPr lang="en-US" dirty="0"/>
+              <a:t/>
+            </a:r>
+            <a:endParaRPr lang="en-US" dirty="0"/>
+          </a:p>
+        </p:txBody>
+      </p:sp>
+      <p:sp>
+        <p:nvSpPr>
+          <p:cNvPr id="4" name="Slide Number Placeholder 3"/>
+          <p:cNvSpPr>
+            <a:spLocks noGrp="1"/>
+          </p:cNvSpPr>
+          <p:nvPr>
+            <p:ph type="sldNum" sz="quarter" idx="10"/>
+          </p:nvPr>
+        </p:nvSpPr>
+        <p:spPr/>
+        <p:txBody>
+          <a:bodyPr/>
+          <a:lstStyle/>
+          <a:p>
+            <a:fld id="{F7021451-1387-4CA6-816F-3879F97B5CBC}" type="slidenum">
+              <a:rPr lang="en-US"/>
+              <a:t>13</a:t>
             </a:fld>
             <a:endParaRPr lang="en-US"/>
           </a:p>
@@ -2011,102 +2189,6 @@
         </p:nvSpPr>
         <p:spPr>
           <a:xfrm>
-            <a:off x="406301" y="1223963"/>
-            <a:ext cx="8498026" cy="274290"/>
-          </a:xfrm>
-          <a:prstGeom prst="rect">
-            <a:avLst/>
-          </a:prstGeom>
-          <a:noFill/>
-          <a:ln/>
-        </p:spPr>
-        <p:txBody>
-          <a:bodyPr wrap="square" lIns="0" tIns="0" rIns="0" bIns="0" rtlCol="0" anchor="t"/>
-          <a:lstStyle/>
-          <a:p>
-            <a:pPr algn="l" indent="0" marL="0">
-              <a:lnSpc>
-                <a:spcPts val="2160"/>
-              </a:lnSpc>
-              <a:spcBef>
-                <a:spcPts val="600"/>
-              </a:spcBef>
-              <a:spcAft>
-                <a:spcPts val="800"/>
-              </a:spcAft>
-              <a:buNone/>
-            </a:pPr>
-            <a:r>
-              <a:rPr lang="en-US" sz="1800" b="1" dirty="0">
-                <a:solidFill>
-                  <a:srgbClr val="FE4447"/>
-                </a:solidFill>
-                <a:latin typeface="Georgia" pitchFamily="34" charset="0"/>
-                <a:ea typeface="Georgia" pitchFamily="34" charset="-122"/>
-                <a:cs typeface="Georgia" pitchFamily="34" charset="-120"/>
-              </a:rPr>
-              <a:t>Learning objective</a:t>
-            </a:r>
-            <a:endParaRPr lang="en-US" sz="1800" dirty="0"/>
-          </a:p>
-        </p:txBody>
-      </p:sp>
-      <p:sp>
-        <p:nvSpPr>
-          <p:cNvPr id="6" name="Text 4"/>
-          <p:cNvSpPr/>
-          <p:nvPr/>
-        </p:nvSpPr>
-        <p:spPr>
-          <a:xfrm>
-            <a:off x="406301" y="1637854"/>
-            <a:ext cx="8498026" cy="426541"/>
-          </a:xfrm>
-          <a:prstGeom prst="rect">
-            <a:avLst/>
-          </a:prstGeom>
-          <a:noFill/>
-          <a:ln/>
-        </p:spPr>
-        <p:txBody>
-          <a:bodyPr wrap="square" lIns="0" tIns="0" rIns="0" bIns="0" rtlCol="0" anchor="t"/>
-          <a:lstStyle/>
-          <a:p>
-            <a:pPr algn="l" indent="0" marL="0">
-              <a:lnSpc>
-                <a:spcPts val="1680"/>
-              </a:lnSpc>
-              <a:spcBef>
-                <a:spcPts val="300"/>
-              </a:spcBef>
-              <a:spcAft>
-                <a:spcPts val="300"/>
-              </a:spcAft>
-              <a:buNone/>
-            </a:pPr>
-            <a:r>
-              <a:rPr lang="en-US" sz="1200" dirty="0">
-                <a:solidFill>
-                  <a:srgbClr val="1C2833"/>
-                </a:solidFill>
-                <a:latin typeface="Arial" pitchFamily="34" charset="0"/>
-                <a:ea typeface="Arial" pitchFamily="34" charset="-122"/>
-                <a:cs typeface="Arial" pitchFamily="34" charset="-120"/>
-              </a:rPr>
-              <a:t>By the end of this lesson, students will demonstrate mastery of the module's learning objectives through a summative quiz and a 3-minute project presentation.</a:t>
-            </a:r>
-            <a:endParaRPr lang="en-US" sz="1200" dirty="0"/>
-          </a:p>
-        </p:txBody>
-      </p:sp>
-      <p:sp>
-        <p:nvSpPr>
-          <p:cNvPr id="7" name="Text 5"/>
-          <p:cNvSpPr/>
-          <p:nvPr/>
-        </p:nvSpPr>
-        <p:spPr>
-          <a:xfrm>
             <a:off x="406301" y="4434929"/>
             <a:ext cx="8498026" cy="213271"/>
           </a:xfrm>
@@ -2251,7 +2333,7 @@
                 <a:ea typeface="Georgia" pitchFamily="34" charset="-122"/>
                 <a:cs typeface="Georgia" pitchFamily="34" charset="-120"/>
               </a:rPr>
-              <a:t>Teacher notes</a:t>
+              <a:t>Homework</a:t>
             </a:r>
             <a:endParaRPr lang="en-US" sz="1800" dirty="0"/>
           </a:p>
@@ -2265,8 +2347,8 @@
         </p:nvSpPr>
         <p:spPr>
           <a:xfrm>
-            <a:off x="406301" y="870942"/>
-            <a:ext cx="8498026" cy="639812"/>
+            <a:off x="634901" y="883593"/>
+            <a:ext cx="8102798" cy="487561"/>
           </a:xfrm>
           <a:prstGeom prst="rect">
             <a:avLst/>
@@ -2278,17 +2360,15 @@
           <a:bodyPr wrap="square" lIns="0" tIns="0" rIns="0" bIns="0" rtlCol="0" anchor="t"/>
           <a:lstStyle/>
           <a:p>
-            <a:pPr algn="l" indent="0" marL="0">
-              <a:lnSpc>
-                <a:spcPts val="1680"/>
-              </a:lnSpc>
-              <a:spcBef>
-                <a:spcPts val="300"/>
-              </a:spcBef>
-              <a:spcAft>
-                <a:spcPts val="300"/>
-              </a:spcAft>
-              <a:buNone/>
+            <a:pPr algn="l" marL="342900" indent="-342900">
+              <a:lnSpc>
+                <a:spcPts val="1620"/>
+              </a:lnSpc>
+              <a:spcAft>
+                <a:spcPts val="300"/>
+              </a:spcAft>
+              <a:buSzPct val="100000"/>
+              <a:buChar char="•"/>
             </a:pPr>
             <a:r>
               <a:rPr lang="en-US" sz="1200" dirty="0">
@@ -2299,7 +2379,7 @@
                 <a:ea typeface="Arial" pitchFamily="34" charset="-122"/>
                 <a:cs typeface="Arial" pitchFamily="34" charset="-120"/>
               </a:rPr>
-              <a:t>– Block out 30 minutes after class for marking the quiz while presentations are fresh. – If presentations spill into Day 11, that's fine — protect that time. Don't compress presentations to fit; you lose the assessment validity. – Mark the rubric in real-time, but write detailed comments only after each presentation finishes — the comment is what students keep.</a:t>
+              <a:t>None. The module is complete. (Begin the next module's prerequisite reading if your sequence flows directly into another.)</a:t>
             </a:r>
             <a:endParaRPr lang="en-US" sz="1200" dirty="0"/>
           </a:p>
@@ -2457,7 +2537,7 @@
                 <a:ea typeface="Georgia" pitchFamily="34" charset="-122"/>
                 <a:cs typeface="Georgia" pitchFamily="34" charset="-120"/>
               </a:rPr>
-              <a:t>Citation(s) used in this lesson</a:t>
+              <a:t>Differentiation</a:t>
             </a:r>
             <a:endParaRPr lang="en-US" sz="1800" dirty="0"/>
           </a:p>
@@ -2471,8 +2551,8 @@
         </p:nvSpPr>
         <p:spPr>
           <a:xfrm>
-            <a:off x="406301" y="870942"/>
-            <a:ext cx="8498026" cy="213271"/>
+            <a:off x="634901" y="883593"/>
+            <a:ext cx="8102798" cy="731341"/>
           </a:xfrm>
           <a:prstGeom prst="rect">
             <a:avLst/>
@@ -2484,20 +2564,18 @@
           <a:bodyPr wrap="square" lIns="0" tIns="0" rIns="0" bIns="0" rtlCol="0" anchor="t"/>
           <a:lstStyle/>
           <a:p>
-            <a:pPr algn="l" indent="0" marL="0">
-              <a:lnSpc>
-                <a:spcPts val="1680"/>
-              </a:lnSpc>
-              <a:spcBef>
-                <a:spcPts val="300"/>
-              </a:spcBef>
-              <a:spcAft>
-                <a:spcPts val="300"/>
-              </a:spcAft>
-              <a:buNone/>
-            </a:pPr>
-            <a:r>
-              <a:rPr lang="en-US" sz="1200" dirty="0">
+            <a:pPr algn="l" marL="342900" indent="-342900">
+              <a:lnSpc>
+                <a:spcPts val="1620"/>
+              </a:lnSpc>
+              <a:spcAft>
+                <a:spcPts val="300"/>
+              </a:spcAft>
+              <a:buSzPct val="100000"/>
+              <a:buChar char="•"/>
+            </a:pPr>
+            <a:r>
+              <a:rPr lang="en-US" sz="1200" b="1" dirty="0">
                 <a:solidFill>
                   <a:srgbClr val="1C2833"/>
                 </a:solidFill>
@@ -2505,7 +2583,527 @@
                 <a:ea typeface="Arial" pitchFamily="34" charset="-122"/>
                 <a:cs typeface="Arial" pitchFamily="34" charset="-120"/>
               </a:rPr>
-              <a:t>– All citations verified across the module.</a:t>
+              <a:t>One tier up:</a:t>
+            </a:r>
+            <a:pPr algn="l" indent="0" marL="0">
+              <a:lnSpc>
+                <a:spcPts val="1620"/>
+              </a:lnSpc>
+              <a:spcAft>
+                <a:spcPts val="300"/>
+              </a:spcAft>
+              <a:buNone/>
+            </a:pPr>
+            <a:r>
+              <a:rPr lang="en-US" sz="1200" dirty="0">
+                <a:solidFill>
+                  <a:srgbClr val="1C2833"/>
+                </a:solidFill>
+                <a:latin typeface="Arial" pitchFamily="34" charset="0"/>
+                <a:ea typeface="Arial" pitchFamily="34" charset="-122"/>
+                <a:cs typeface="Arial" pitchFamily="34" charset="-120"/>
+              </a:rPr>
+              <a:t> A student who finishes the quiz early can write a 1-paragraph "what would Module 2 look like for a class of Grade 11 students?" — useful input for the Senior-band pack.</a:t>
+            </a:r>
+            <a:endParaRPr lang="en-US" sz="1200" dirty="0"/>
+          </a:p>
+          <a:p>
+            <a:pPr algn="l" marL="342900" indent="-342900">
+              <a:lnSpc>
+                <a:spcPts val="1620"/>
+              </a:lnSpc>
+              <a:spcAft>
+                <a:spcPts val="300"/>
+              </a:spcAft>
+              <a:buSzPct val="100000"/>
+              <a:buChar char="•"/>
+            </a:pPr>
+            <a:r>
+              <a:rPr lang="en-US" sz="1200" b="1" dirty="0">
+                <a:solidFill>
+                  <a:srgbClr val="1C2833"/>
+                </a:solidFill>
+                <a:latin typeface="Arial" pitchFamily="34" charset="0"/>
+                <a:ea typeface="Arial" pitchFamily="34" charset="-122"/>
+                <a:cs typeface="Arial" pitchFamily="34" charset="-120"/>
+              </a:rPr>
+              <a:t>One tier down:</a:t>
+            </a:r>
+            <a:pPr algn="l" indent="0" marL="0">
+              <a:lnSpc>
+                <a:spcPts val="1620"/>
+              </a:lnSpc>
+              <a:spcAft>
+                <a:spcPts val="300"/>
+              </a:spcAft>
+              <a:buNone/>
+            </a:pPr>
+            <a:r>
+              <a:rPr lang="en-US" sz="1200" dirty="0">
+                <a:solidFill>
+                  <a:srgbClr val="1C2833"/>
+                </a:solidFill>
+                <a:latin typeface="Arial" pitchFamily="34" charset="0"/>
+                <a:ea typeface="Arial" pitchFamily="34" charset="-122"/>
+                <a:cs typeface="Arial" pitchFamily="34" charset="-120"/>
+              </a:rPr>
+              <a:t> Allow the quiz to be open-notebook for a student with documented learning needs — your call.</a:t>
+            </a:r>
+            <a:endParaRPr lang="en-US" sz="1200" dirty="0"/>
+          </a:p>
+        </p:txBody>
+      </p:sp>
+      <p:sp>
+        <p:nvSpPr>
+          <p:cNvPr id="5" name="Text 3"/>
+          <p:cNvSpPr/>
+          <p:nvPr/>
+        </p:nvSpPr>
+        <p:spPr>
+          <a:xfrm>
+            <a:off x="406301" y="4434929"/>
+            <a:ext cx="8498026" cy="213271"/>
+          </a:xfrm>
+          <a:prstGeom prst="rect">
+            <a:avLst/>
+          </a:prstGeom>
+          <a:noFill/>
+          <a:ln/>
+        </p:spPr>
+        <p:txBody>
+          <a:bodyPr wrap="square" lIns="0" tIns="0" rIns="0" bIns="0" rtlCol="0" anchor="t"/>
+          <a:lstStyle/>
+          <a:p>
+            <a:pPr algn="l" indent="0" marL="0">
+              <a:lnSpc>
+                <a:spcPts val="1680"/>
+              </a:lnSpc>
+              <a:spcBef>
+                <a:spcPts val="300"/>
+              </a:spcBef>
+              <a:spcAft>
+                <a:spcPts val="300"/>
+              </a:spcAft>
+              <a:buNone/>
+            </a:pPr>
+            <a:r>
+              <a:rPr lang="en-US" sz="1200" dirty="0">
+                <a:solidFill>
+                  <a:srgbClr val="1C2833"/>
+                </a:solidFill>
+                <a:latin typeface="Arial" pitchFamily="34" charset="0"/>
+                <a:ea typeface="Arial" pitchFamily="34" charset="-122"/>
+                <a:cs typeface="Arial" pitchFamily="34" charset="-120"/>
+              </a:rPr>
+              <a:t>Middle ·  · IKS Curriculum</a:t>
+            </a:r>
+            <a:endParaRPr lang="en-US" sz="1200" dirty="0"/>
+          </a:p>
+        </p:txBody>
+      </p:sp>
+    </p:spTree>
+  </p:cSld>
+  <p:clrMapOvr>
+    <a:masterClrMapping/>
+  </p:clrMapOvr>
+</p:sld>
+</file>
+
+<file path=ppt/slides/slide12.xml><?xml version="1.0" encoding="utf-8"?>
+<p:sld xmlns:a="http://schemas.openxmlformats.org/drawingml/2006/main" xmlns:r="http://schemas.openxmlformats.org/officeDocument/2006/relationships" xmlns:p="http://schemas.openxmlformats.org/presentationml/2006/main">
+  <p:cSld name="Slide 12">
+    <p:bg>
+      <p:bgPr>
+        <a:solidFill>
+          <a:srgbClr val="FFFFFF"/>
+        </a:solidFill>
+      </p:bgPr>
+    </p:bg>
+    <p:spTree>
+      <p:nvGrpSpPr>
+        <p:cNvPr id="1" name=""/>
+        <p:cNvGrpSpPr/>
+        <p:nvPr/>
+      </p:nvGrpSpPr>
+      <p:grpSpPr>
+        <a:xfrm>
+          <a:off x="0" y="0"/>
+          <a:ext cx="0" cy="0"/>
+          <a:chOff x="0" y="0"/>
+          <a:chExt cx="0" cy="0"/>
+        </a:xfrm>
+      </p:grpSpPr>
+      <p:sp>
+        <p:nvSpPr>
+          <p:cNvPr id="2" name="Text 0"/>
+          <p:cNvSpPr/>
+          <p:nvPr/>
+        </p:nvSpPr>
+        <p:spPr>
+          <a:xfrm>
+            <a:off x="0" y="0"/>
+            <a:ext cx="9144000" cy="101501"/>
+          </a:xfrm>
+          <a:prstGeom prst="rect">
+            <a:avLst/>
+          </a:prstGeom>
+          <a:solidFill>
+            <a:srgbClr val="277884"/>
+          </a:solidFill>
+          <a:ln/>
+        </p:spPr>
+        <p:txBody>
+          <a:bodyPr wrap="square" rtlCol="0" anchor="ctr"/>
+          <a:lstStyle/>
+          <a:p>
+            <a:pPr indent="0" marL="0">
+              <a:buNone/>
+            </a:pPr>
+            <a:endParaRPr lang="en-US" dirty="0"/>
+          </a:p>
+        </p:txBody>
+      </p:sp>
+      <p:sp>
+        <p:nvSpPr>
+          <p:cNvPr id="3" name="Text 1"/>
+          <p:cNvSpPr/>
+          <p:nvPr/>
+        </p:nvSpPr>
+        <p:spPr>
+          <a:xfrm>
+            <a:off x="406301" y="457051"/>
+            <a:ext cx="8498026" cy="274290"/>
+          </a:xfrm>
+          <a:prstGeom prst="rect">
+            <a:avLst/>
+          </a:prstGeom>
+          <a:noFill/>
+          <a:ln/>
+        </p:spPr>
+        <p:txBody>
+          <a:bodyPr wrap="square" lIns="0" tIns="0" rIns="0" bIns="0" rtlCol="0" anchor="t"/>
+          <a:lstStyle/>
+          <a:p>
+            <a:pPr algn="l" indent="0" marL="0">
+              <a:lnSpc>
+                <a:spcPts val="2160"/>
+              </a:lnSpc>
+              <a:spcBef>
+                <a:spcPts val="600"/>
+              </a:spcBef>
+              <a:spcAft>
+                <a:spcPts val="800"/>
+              </a:spcAft>
+              <a:buNone/>
+            </a:pPr>
+            <a:r>
+              <a:rPr lang="en-US" sz="1800" b="1" dirty="0">
+                <a:solidFill>
+                  <a:srgbClr val="FE4447"/>
+                </a:solidFill>
+                <a:latin typeface="Georgia" pitchFamily="34" charset="0"/>
+                <a:ea typeface="Georgia" pitchFamily="34" charset="-122"/>
+                <a:cs typeface="Georgia" pitchFamily="34" charset="-120"/>
+              </a:rPr>
+              <a:t>Teacher notes</a:t>
+            </a:r>
+            <a:endParaRPr lang="en-US" sz="1800" dirty="0"/>
+          </a:p>
+        </p:txBody>
+      </p:sp>
+      <p:sp>
+        <p:nvSpPr>
+          <p:cNvPr id="4" name="Text 2"/>
+          <p:cNvSpPr/>
+          <p:nvPr/>
+        </p:nvSpPr>
+        <p:spPr>
+          <a:xfrm>
+            <a:off x="634901" y="883593"/>
+            <a:ext cx="8102798" cy="1180802"/>
+          </a:xfrm>
+          <a:prstGeom prst="rect">
+            <a:avLst/>
+          </a:prstGeom>
+          <a:noFill/>
+          <a:ln/>
+        </p:spPr>
+        <p:txBody>
+          <a:bodyPr wrap="square" lIns="0" tIns="0" rIns="0" bIns="0" rtlCol="0" anchor="t"/>
+          <a:lstStyle/>
+          <a:p>
+            <a:pPr algn="l" marL="342900" indent="-342900">
+              <a:lnSpc>
+                <a:spcPts val="1620"/>
+              </a:lnSpc>
+              <a:spcAft>
+                <a:spcPts val="300"/>
+              </a:spcAft>
+              <a:buSzPct val="100000"/>
+              <a:buChar char="•"/>
+            </a:pPr>
+            <a:r>
+              <a:rPr lang="en-US" sz="1200" dirty="0">
+                <a:solidFill>
+                  <a:srgbClr val="1C2833"/>
+                </a:solidFill>
+                <a:latin typeface="Arial" pitchFamily="34" charset="0"/>
+                <a:ea typeface="Arial" pitchFamily="34" charset="-122"/>
+                <a:cs typeface="Arial" pitchFamily="34" charset="-120"/>
+              </a:rPr>
+              <a:t>Block out 30 minutes after class for marking the quiz while presentations are fresh.</a:t>
+            </a:r>
+            <a:endParaRPr lang="en-US" sz="1200" dirty="0"/>
+          </a:p>
+          <a:p>
+            <a:pPr algn="l" marL="342900" indent="-342900">
+              <a:lnSpc>
+                <a:spcPts val="1620"/>
+              </a:lnSpc>
+              <a:spcAft>
+                <a:spcPts val="300"/>
+              </a:spcAft>
+              <a:buSzPct val="100000"/>
+              <a:buChar char="•"/>
+            </a:pPr>
+            <a:r>
+              <a:rPr lang="en-US" sz="1200" dirty="0">
+                <a:solidFill>
+                  <a:srgbClr val="1C2833"/>
+                </a:solidFill>
+                <a:latin typeface="Arial" pitchFamily="34" charset="0"/>
+                <a:ea typeface="Arial" pitchFamily="34" charset="-122"/>
+                <a:cs typeface="Arial" pitchFamily="34" charset="-120"/>
+              </a:rPr>
+              <a:t>If presentations spill into Day 11, that's fine — protect that time. Don't compress presentations to fit; you lose the assessment validity.</a:t>
+            </a:r>
+            <a:endParaRPr lang="en-US" sz="1200" dirty="0"/>
+          </a:p>
+          <a:p>
+            <a:pPr algn="l" marL="342900" indent="-342900">
+              <a:lnSpc>
+                <a:spcPts val="1620"/>
+              </a:lnSpc>
+              <a:spcAft>
+                <a:spcPts val="300"/>
+              </a:spcAft>
+              <a:buSzPct val="100000"/>
+              <a:buChar char="•"/>
+            </a:pPr>
+            <a:r>
+              <a:rPr lang="en-US" sz="1200" dirty="0">
+                <a:solidFill>
+                  <a:srgbClr val="1C2833"/>
+                </a:solidFill>
+                <a:latin typeface="Arial" pitchFamily="34" charset="0"/>
+                <a:ea typeface="Arial" pitchFamily="34" charset="-122"/>
+                <a:cs typeface="Arial" pitchFamily="34" charset="-120"/>
+              </a:rPr>
+              <a:t>Mark the rubric in real-time, but write detailed comments only after each presentation finishes — the comment is what students keep.</a:t>
+            </a:r>
+            <a:endParaRPr lang="en-US" sz="1200" dirty="0"/>
+          </a:p>
+        </p:txBody>
+      </p:sp>
+      <p:sp>
+        <p:nvSpPr>
+          <p:cNvPr id="5" name="Text 3"/>
+          <p:cNvSpPr/>
+          <p:nvPr/>
+        </p:nvSpPr>
+        <p:spPr>
+          <a:xfrm>
+            <a:off x="406301" y="4434929"/>
+            <a:ext cx="8498026" cy="213271"/>
+          </a:xfrm>
+          <a:prstGeom prst="rect">
+            <a:avLst/>
+          </a:prstGeom>
+          <a:noFill/>
+          <a:ln/>
+        </p:spPr>
+        <p:txBody>
+          <a:bodyPr wrap="square" lIns="0" tIns="0" rIns="0" bIns="0" rtlCol="0" anchor="t"/>
+          <a:lstStyle/>
+          <a:p>
+            <a:pPr algn="l" indent="0" marL="0">
+              <a:lnSpc>
+                <a:spcPts val="1680"/>
+              </a:lnSpc>
+              <a:spcBef>
+                <a:spcPts val="300"/>
+              </a:spcBef>
+              <a:spcAft>
+                <a:spcPts val="300"/>
+              </a:spcAft>
+              <a:buNone/>
+            </a:pPr>
+            <a:r>
+              <a:rPr lang="en-US" sz="1200" dirty="0">
+                <a:solidFill>
+                  <a:srgbClr val="1C2833"/>
+                </a:solidFill>
+                <a:latin typeface="Arial" pitchFamily="34" charset="0"/>
+                <a:ea typeface="Arial" pitchFamily="34" charset="-122"/>
+                <a:cs typeface="Arial" pitchFamily="34" charset="-120"/>
+              </a:rPr>
+              <a:t>Middle ·  · IKS Curriculum</a:t>
+            </a:r>
+            <a:endParaRPr lang="en-US" sz="1200" dirty="0"/>
+          </a:p>
+        </p:txBody>
+      </p:sp>
+    </p:spTree>
+  </p:cSld>
+  <p:clrMapOvr>
+    <a:masterClrMapping/>
+  </p:clrMapOvr>
+</p:sld>
+</file>
+
+<file path=ppt/slides/slide13.xml><?xml version="1.0" encoding="utf-8"?>
+<p:sld xmlns:a="http://schemas.openxmlformats.org/drawingml/2006/main" xmlns:r="http://schemas.openxmlformats.org/officeDocument/2006/relationships" xmlns:p="http://schemas.openxmlformats.org/presentationml/2006/main">
+  <p:cSld name="Slide 13">
+    <p:bg>
+      <p:bgPr>
+        <a:solidFill>
+          <a:srgbClr val="FFFFFF"/>
+        </a:solidFill>
+      </p:bgPr>
+    </p:bg>
+    <p:spTree>
+      <p:nvGrpSpPr>
+        <p:cNvPr id="1" name=""/>
+        <p:cNvGrpSpPr/>
+        <p:nvPr/>
+      </p:nvGrpSpPr>
+      <p:grpSpPr>
+        <a:xfrm>
+          <a:off x="0" y="0"/>
+          <a:ext cx="0" cy="0"/>
+          <a:chOff x="0" y="0"/>
+          <a:chExt cx="0" cy="0"/>
+        </a:xfrm>
+      </p:grpSpPr>
+      <p:sp>
+        <p:nvSpPr>
+          <p:cNvPr id="2" name="Text 0"/>
+          <p:cNvSpPr/>
+          <p:nvPr/>
+        </p:nvSpPr>
+        <p:spPr>
+          <a:xfrm>
+            <a:off x="0" y="0"/>
+            <a:ext cx="9144000" cy="101501"/>
+          </a:xfrm>
+          <a:prstGeom prst="rect">
+            <a:avLst/>
+          </a:prstGeom>
+          <a:solidFill>
+            <a:srgbClr val="277884"/>
+          </a:solidFill>
+          <a:ln/>
+        </p:spPr>
+        <p:txBody>
+          <a:bodyPr wrap="square" rtlCol="0" anchor="ctr"/>
+          <a:lstStyle/>
+          <a:p>
+            <a:pPr indent="0" marL="0">
+              <a:buNone/>
+            </a:pPr>
+            <a:endParaRPr lang="en-US" dirty="0"/>
+          </a:p>
+        </p:txBody>
+      </p:sp>
+      <p:sp>
+        <p:nvSpPr>
+          <p:cNvPr id="3" name="Text 1"/>
+          <p:cNvSpPr/>
+          <p:nvPr/>
+        </p:nvSpPr>
+        <p:spPr>
+          <a:xfrm>
+            <a:off x="406301" y="457051"/>
+            <a:ext cx="8498026" cy="274290"/>
+          </a:xfrm>
+          <a:prstGeom prst="rect">
+            <a:avLst/>
+          </a:prstGeom>
+          <a:noFill/>
+          <a:ln/>
+        </p:spPr>
+        <p:txBody>
+          <a:bodyPr wrap="square" lIns="0" tIns="0" rIns="0" bIns="0" rtlCol="0" anchor="t"/>
+          <a:lstStyle/>
+          <a:p>
+            <a:pPr algn="l" indent="0" marL="0">
+              <a:lnSpc>
+                <a:spcPts val="2160"/>
+              </a:lnSpc>
+              <a:spcBef>
+                <a:spcPts val="600"/>
+              </a:spcBef>
+              <a:spcAft>
+                <a:spcPts val="800"/>
+              </a:spcAft>
+              <a:buNone/>
+            </a:pPr>
+            <a:r>
+              <a:rPr lang="en-US" sz="1800" b="1" dirty="0">
+                <a:solidFill>
+                  <a:srgbClr val="FE4447"/>
+                </a:solidFill>
+                <a:latin typeface="Georgia" pitchFamily="34" charset="0"/>
+                <a:ea typeface="Georgia" pitchFamily="34" charset="-122"/>
+                <a:cs typeface="Georgia" pitchFamily="34" charset="-120"/>
+              </a:rPr>
+              <a:t>Citation(s) used in this lesson</a:t>
+            </a:r>
+            <a:endParaRPr lang="en-US" sz="1800" dirty="0"/>
+          </a:p>
+        </p:txBody>
+      </p:sp>
+      <p:sp>
+        <p:nvSpPr>
+          <p:cNvPr id="4" name="Text 2"/>
+          <p:cNvSpPr/>
+          <p:nvPr/>
+        </p:nvSpPr>
+        <p:spPr>
+          <a:xfrm>
+            <a:off x="634901" y="883593"/>
+            <a:ext cx="8102798" cy="281880"/>
+          </a:xfrm>
+          <a:prstGeom prst="rect">
+            <a:avLst/>
+          </a:prstGeom>
+          <a:noFill/>
+          <a:ln/>
+        </p:spPr>
+        <p:txBody>
+          <a:bodyPr wrap="square" lIns="0" tIns="0" rIns="0" bIns="0" rtlCol="0" anchor="t"/>
+          <a:lstStyle/>
+          <a:p>
+            <a:pPr algn="l" marL="342900" indent="-342900">
+              <a:lnSpc>
+                <a:spcPts val="1620"/>
+              </a:lnSpc>
+              <a:spcAft>
+                <a:spcPts val="300"/>
+              </a:spcAft>
+              <a:buSzPct val="100000"/>
+              <a:buChar char="•"/>
+            </a:pPr>
+            <a:r>
+              <a:rPr lang="en-US" sz="1200" dirty="0">
+                <a:solidFill>
+                  <a:srgbClr val="1C2833"/>
+                </a:solidFill>
+                <a:latin typeface="Arial" pitchFamily="34" charset="0"/>
+                <a:ea typeface="Arial" pitchFamily="34" charset="-122"/>
+                <a:cs typeface="Arial" pitchFamily="34" charset="-120"/>
+              </a:rPr>
+              <a:t>All citations verified across the module.</a:t>
             </a:r>
             <a:endParaRPr lang="en-US" sz="1200" dirty="0"/>
           </a:p>
@@ -2663,7 +3261,7 @@
                 <a:ea typeface="Georgia" pitchFamily="34" charset="-122"/>
                 <a:cs typeface="Georgia" pitchFamily="34" charset="-120"/>
               </a:rPr>
-              <a:t>Materials</a:t>
+              <a:t>Learning objective</a:t>
             </a:r>
             <a:endParaRPr lang="en-US" sz="1800" dirty="0"/>
           </a:p>
@@ -2678,7 +3276,7 @@
         <p:spPr>
           <a:xfrm>
             <a:off x="406301" y="870942"/>
-            <a:ext cx="8498026" cy="436066"/>
+            <a:ext cx="8498026" cy="426541"/>
           </a:xfrm>
           <a:prstGeom prst="rect">
             <a:avLst/>
@@ -2711,53 +3309,7 @@
                 <a:ea typeface="Arial" pitchFamily="34" charset="-122"/>
                 <a:cs typeface="Arial" pitchFamily="34" charset="-120"/>
               </a:rPr>
-              <a:t>– Printed summative quiz (</a:t>
-            </a:r>
-            <a:pPr algn="l" indent="0" marL="0">
-              <a:lnSpc>
-                <a:spcPts val="1680"/>
-              </a:lnSpc>
-              <a:spcBef>
-                <a:spcPts val="300"/>
-              </a:spcBef>
-              <a:spcAft>
-                <a:spcPts val="300"/>
-              </a:spcAft>
-              <a:buNone/>
-            </a:pPr>
-            <a:r>
-              <a:rPr lang="en-US" sz="1200" dirty="0">
-                <a:solidFill>
-                  <a:srgbClr val="1C2833"/>
-                </a:solidFill>
-                <a:latin typeface="Arial" pitchFamily="34" charset="0"/>
-                <a:ea typeface="Arial" pitchFamily="34" charset="-122"/>
-                <a:cs typeface="Arial" pitchFamily="34" charset="-120"/>
-              </a:rPr>
-              <a:t>quizzes/summative.md</a:t>
-            </a:r>
-            <a:pPr algn="l" indent="0" marL="0">
-              <a:lnSpc>
-                <a:spcPts val="1680"/>
-              </a:lnSpc>
-              <a:spcBef>
-                <a:spcPts val="300"/>
-              </a:spcBef>
-              <a:spcAft>
-                <a:spcPts val="300"/>
-              </a:spcAft>
-              <a:buNone/>
-            </a:pPr>
-            <a:r>
-              <a:rPr lang="en-US" sz="1200" dirty="0">
-                <a:solidFill>
-                  <a:srgbClr val="1C2833"/>
-                </a:solidFill>
-                <a:latin typeface="Arial" pitchFamily="34" charset="0"/>
-                <a:ea typeface="Arial" pitchFamily="34" charset="-122"/>
-                <a:cs typeface="Arial" pitchFamily="34" charset="-120"/>
-              </a:rPr>
-              <a:t>) — one per student. – Stopwatch. – Rubric copy (printed) for each pair, with teacher marking column. – A "reflection slip" — one per student.</a:t>
+              <a:t>By the end of this lesson, students will demonstrate mastery of the module's learning objectives through a summative quiz and a 3-minute project presentation.</a:t>
             </a:r>
             <a:endParaRPr lang="en-US" sz="1200" dirty="0"/>
           </a:p>
@@ -2915,7 +3467,7 @@
                 <a:ea typeface="Georgia" pitchFamily="34" charset="-122"/>
                 <a:cs typeface="Georgia" pitchFamily="34" charset="-120"/>
               </a:rPr>
-              <a:t>Lesson flow</a:t>
+              <a:t>Materials</a:t>
             </a:r>
             <a:endParaRPr lang="en-US" sz="1800" dirty="0"/>
           </a:p>
@@ -2924,6 +3476,164 @@
       <p:sp>
         <p:nvSpPr>
           <p:cNvPr id="4" name="Text 2"/>
+          <p:cNvSpPr/>
+          <p:nvPr/>
+        </p:nvSpPr>
+        <p:spPr>
+          <a:xfrm>
+            <a:off x="634901" y="883593"/>
+            <a:ext cx="8102798" cy="1032272"/>
+          </a:xfrm>
+          <a:prstGeom prst="rect">
+            <a:avLst/>
+          </a:prstGeom>
+          <a:noFill/>
+          <a:ln/>
+        </p:spPr>
+        <p:txBody>
+          <a:bodyPr wrap="square" lIns="0" tIns="0" rIns="0" bIns="0" rtlCol="0" anchor="t"/>
+          <a:lstStyle/>
+          <a:p>
+            <a:pPr algn="l" marL="342900" indent="-342900">
+              <a:lnSpc>
+                <a:spcPts val="1620"/>
+              </a:lnSpc>
+              <a:spcAft>
+                <a:spcPts val="300"/>
+              </a:spcAft>
+              <a:buSzPct val="100000"/>
+              <a:buChar char="•"/>
+            </a:pPr>
+            <a:r>
+              <a:rPr lang="en-US" sz="1200" dirty="0">
+                <a:solidFill>
+                  <a:srgbClr val="1C2833"/>
+                </a:solidFill>
+                <a:latin typeface="Arial" pitchFamily="34" charset="0"/>
+                <a:ea typeface="Arial" pitchFamily="34" charset="-122"/>
+                <a:cs typeface="Arial" pitchFamily="34" charset="-120"/>
+              </a:rPr>
+              <a:t>Printed summative quiz (</a:t>
+            </a:r>
+            <a:pPr algn="l" indent="0" marL="0">
+              <a:lnSpc>
+                <a:spcPts val="1620"/>
+              </a:lnSpc>
+              <a:spcAft>
+                <a:spcPts val="300"/>
+              </a:spcAft>
+              <a:buNone/>
+            </a:pPr>
+            <a:r>
+              <a:rPr lang="en-US" sz="1200" dirty="0">
+                <a:solidFill>
+                  <a:srgbClr val="1C2833"/>
+                </a:solidFill>
+                <a:latin typeface="Arial" pitchFamily="34" charset="0"/>
+                <a:ea typeface="Arial" pitchFamily="34" charset="-122"/>
+                <a:cs typeface="Arial" pitchFamily="34" charset="-120"/>
+              </a:rPr>
+              <a:t>quizzes/summative.md</a:t>
+            </a:r>
+            <a:pPr algn="l" indent="0" marL="0">
+              <a:lnSpc>
+                <a:spcPts val="1620"/>
+              </a:lnSpc>
+              <a:spcAft>
+                <a:spcPts val="300"/>
+              </a:spcAft>
+              <a:buNone/>
+            </a:pPr>
+            <a:r>
+              <a:rPr lang="en-US" sz="1200" dirty="0">
+                <a:solidFill>
+                  <a:srgbClr val="1C2833"/>
+                </a:solidFill>
+                <a:latin typeface="Arial" pitchFamily="34" charset="0"/>
+                <a:ea typeface="Arial" pitchFamily="34" charset="-122"/>
+                <a:cs typeface="Arial" pitchFamily="34" charset="-120"/>
+              </a:rPr>
+              <a:t>) — one per student.</a:t>
+            </a:r>
+            <a:endParaRPr lang="en-US" sz="1200" dirty="0"/>
+          </a:p>
+          <a:p>
+            <a:pPr algn="l" marL="342900" indent="-342900">
+              <a:lnSpc>
+                <a:spcPts val="1620"/>
+              </a:lnSpc>
+              <a:spcAft>
+                <a:spcPts val="300"/>
+              </a:spcAft>
+              <a:buSzPct val="100000"/>
+              <a:buChar char="•"/>
+            </a:pPr>
+            <a:r>
+              <a:rPr lang="en-US" sz="1200" dirty="0">
+                <a:solidFill>
+                  <a:srgbClr val="1C2833"/>
+                </a:solidFill>
+                <a:latin typeface="Arial" pitchFamily="34" charset="0"/>
+                <a:ea typeface="Arial" pitchFamily="34" charset="-122"/>
+                <a:cs typeface="Arial" pitchFamily="34" charset="-120"/>
+              </a:rPr>
+              <a:t>Stopwatch.</a:t>
+            </a:r>
+            <a:endParaRPr lang="en-US" sz="1200" dirty="0"/>
+          </a:p>
+          <a:p>
+            <a:pPr algn="l" marL="342900" indent="-342900">
+              <a:lnSpc>
+                <a:spcPts val="1620"/>
+              </a:lnSpc>
+              <a:spcAft>
+                <a:spcPts val="300"/>
+              </a:spcAft>
+              <a:buSzPct val="100000"/>
+              <a:buChar char="•"/>
+            </a:pPr>
+            <a:r>
+              <a:rPr lang="en-US" sz="1200" dirty="0">
+                <a:solidFill>
+                  <a:srgbClr val="1C2833"/>
+                </a:solidFill>
+                <a:latin typeface="Arial" pitchFamily="34" charset="0"/>
+                <a:ea typeface="Arial" pitchFamily="34" charset="-122"/>
+                <a:cs typeface="Arial" pitchFamily="34" charset="-120"/>
+              </a:rPr>
+              <a:t>Rubric copy (printed) for each pair, with teacher marking column.</a:t>
+            </a:r>
+            <a:endParaRPr lang="en-US" sz="1200" dirty="0"/>
+          </a:p>
+          <a:p>
+            <a:pPr algn="l" marL="342900" indent="-342900">
+              <a:lnSpc>
+                <a:spcPts val="1620"/>
+              </a:lnSpc>
+              <a:spcAft>
+                <a:spcPts val="300"/>
+              </a:spcAft>
+              <a:buSzPct val="100000"/>
+              <a:buChar char="•"/>
+            </a:pPr>
+            <a:r>
+              <a:rPr lang="en-US" sz="1200" dirty="0">
+                <a:solidFill>
+                  <a:srgbClr val="1C2833"/>
+                </a:solidFill>
+                <a:latin typeface="Arial" pitchFamily="34" charset="0"/>
+                <a:ea typeface="Arial" pitchFamily="34" charset="-122"/>
+                <a:cs typeface="Arial" pitchFamily="34" charset="-120"/>
+              </a:rPr>
+              <a:t>A "reflection slip" — one per student.</a:t>
+            </a:r>
+            <a:endParaRPr lang="en-US" sz="1200" dirty="0"/>
+          </a:p>
+        </p:txBody>
+      </p:sp>
+      <p:sp>
+        <p:nvSpPr>
+          <p:cNvPr id="5" name="Text 3"/>
           <p:cNvSpPr/>
           <p:nvPr/>
         </p:nvSpPr>
@@ -3073,7 +3783,7 @@
                 <a:ea typeface="Georgia" pitchFamily="34" charset="-122"/>
                 <a:cs typeface="Georgia" pitchFamily="34" charset="-120"/>
               </a:rPr>
-              <a:t>Warm-up (3 min)</a:t>
+              <a:t>Lesson flow</a:t>
             </a:r>
             <a:endParaRPr lang="en-US" sz="1800" dirty="0"/>
           </a:p>
@@ -3082,54 +3792,6 @@
       <p:sp>
         <p:nvSpPr>
           <p:cNvPr id="4" name="Text 2"/>
-          <p:cNvSpPr/>
-          <p:nvPr/>
-        </p:nvSpPr>
-        <p:spPr>
-          <a:xfrm>
-            <a:off x="406301" y="870942"/>
-            <a:ext cx="8498026" cy="426541"/>
-          </a:xfrm>
-          <a:prstGeom prst="rect">
-            <a:avLst/>
-          </a:prstGeom>
-          <a:noFill/>
-          <a:ln/>
-        </p:spPr>
-        <p:txBody>
-          <a:bodyPr wrap="square" lIns="0" tIns="0" rIns="0" bIns="0" rtlCol="0" anchor="t"/>
-          <a:lstStyle/>
-          <a:p>
-            <a:pPr algn="l" indent="0" marL="0">
-              <a:lnSpc>
-                <a:spcPts val="1680"/>
-              </a:lnSpc>
-              <a:spcBef>
-                <a:spcPts val="300"/>
-              </a:spcBef>
-              <a:spcAft>
-                <a:spcPts val="300"/>
-              </a:spcAft>
-              <a:buNone/>
-            </a:pPr>
-            <a:r>
-              <a:rPr lang="en-US" sz="1200" dirty="0">
-                <a:solidFill>
-                  <a:srgbClr val="1C2833"/>
-                </a:solidFill>
-                <a:latin typeface="Arial" pitchFamily="34" charset="0"/>
-                <a:ea typeface="Arial" pitchFamily="34" charset="-122"/>
-                <a:cs typeface="Arial" pitchFamily="34" charset="-120"/>
-              </a:rPr>
-              <a:t>– No daily prompt today. – Brief: "Two parts today — a quiz first, then your presentations. Quiz is 20 minutes, individual. Presentations after."</a:t>
-            </a:r>
-            <a:endParaRPr lang="en-US" sz="1200" dirty="0"/>
-          </a:p>
-        </p:txBody>
-      </p:sp>
-      <p:sp>
-        <p:nvSpPr>
-          <p:cNvPr id="5" name="Text 3"/>
           <p:cNvSpPr/>
           <p:nvPr/>
         </p:nvSpPr>
@@ -3279,7 +3941,7 @@
                 <a:ea typeface="Georgia" pitchFamily="34" charset="-122"/>
                 <a:cs typeface="Georgia" pitchFamily="34" charset="-120"/>
               </a:rPr>
-              <a:t>Part 1: Summative Quiz (20 min)</a:t>
+              <a:t>Warm-up (3 min)</a:t>
             </a:r>
             <a:endParaRPr lang="en-US" sz="1800" dirty="0"/>
           </a:p>
@@ -3293,8 +3955,8 @@
         </p:nvSpPr>
         <p:spPr>
           <a:xfrm>
-            <a:off x="406301" y="870942"/>
-            <a:ext cx="8498026" cy="649337"/>
+            <a:off x="634901" y="883593"/>
+            <a:ext cx="8102798" cy="525661"/>
           </a:xfrm>
           <a:prstGeom prst="rect">
             <a:avLst/>
@@ -3306,17 +3968,15 @@
           <a:bodyPr wrap="square" lIns="0" tIns="0" rIns="0" bIns="0" rtlCol="0" anchor="t"/>
           <a:lstStyle/>
           <a:p>
-            <a:pPr algn="l" indent="0" marL="0">
-              <a:lnSpc>
-                <a:spcPts val="1680"/>
-              </a:lnSpc>
-              <a:spcBef>
-                <a:spcPts val="300"/>
-              </a:spcBef>
-              <a:spcAft>
-                <a:spcPts val="300"/>
-              </a:spcAft>
-              <a:buNone/>
+            <a:pPr algn="l" marL="342900" indent="-342900">
+              <a:lnSpc>
+                <a:spcPts val="1620"/>
+              </a:lnSpc>
+              <a:spcAft>
+                <a:spcPts val="300"/>
+              </a:spcAft>
+              <a:buSzPct val="100000"/>
+              <a:buChar char="•"/>
             </a:pPr>
             <a:r>
               <a:rPr lang="en-US" sz="1200" dirty="0">
@@ -3327,19 +3987,20 @@
                 <a:ea typeface="Arial" pitchFamily="34" charset="-122"/>
                 <a:cs typeface="Arial" pitchFamily="34" charset="-120"/>
               </a:rPr>
-              <a:t>– Distribute </a:t>
-            </a:r>
-            <a:pPr algn="l" indent="0" marL="0">
-              <a:lnSpc>
-                <a:spcPts val="1680"/>
-              </a:lnSpc>
-              <a:spcBef>
-                <a:spcPts val="300"/>
-              </a:spcBef>
-              <a:spcAft>
-                <a:spcPts val="300"/>
-              </a:spcAft>
-              <a:buNone/>
+              <a:t>No daily prompt today.</a:t>
+            </a:r>
+            <a:endParaRPr lang="en-US" sz="1200" dirty="0"/>
+          </a:p>
+          <a:p>
+            <a:pPr algn="l" marL="342900" indent="-342900">
+              <a:lnSpc>
+                <a:spcPts val="1620"/>
+              </a:lnSpc>
+              <a:spcAft>
+                <a:spcPts val="300"/>
+              </a:spcAft>
+              <a:buSzPct val="100000"/>
+              <a:buChar char="•"/>
             </a:pPr>
             <a:r>
               <a:rPr lang="en-US" sz="1200" dirty="0">
@@ -3350,30 +4011,7 @@
                 <a:ea typeface="Arial" pitchFamily="34" charset="-122"/>
                 <a:cs typeface="Arial" pitchFamily="34" charset="-120"/>
               </a:rPr>
-              <a:t>quizzes/summative.md</a:t>
-            </a:r>
-            <a:pPr algn="l" indent="0" marL="0">
-              <a:lnSpc>
-                <a:spcPts val="1680"/>
-              </a:lnSpc>
-              <a:spcBef>
-                <a:spcPts val="300"/>
-              </a:spcBef>
-              <a:spcAft>
-                <a:spcPts val="300"/>
-              </a:spcAft>
-              <a:buNone/>
-            </a:pPr>
-            <a:r>
-              <a:rPr lang="en-US" sz="1200" dirty="0">
-                <a:solidFill>
-                  <a:srgbClr val="1C2833"/>
-                </a:solidFill>
-                <a:latin typeface="Arial" pitchFamily="34" charset="0"/>
-                <a:ea typeface="Arial" pitchFamily="34" charset="-122"/>
-                <a:cs typeface="Arial" pitchFamily="34" charset="-120"/>
-              </a:rPr>
-              <a:t>. Closed-book. No discussion. – Quiz covers: element names (Sanskrit + English), creation sequence, quality-count rule, tanmātra-to-sense mapping, one comparison question on pañcabhūta vs. modern science, one open-response on element imbalance. – Collect quizzes at 20-min mark.</a:t>
+              <a:t>Brief: "Two parts today — a quiz first, then your presentations. Quiz is 20 minutes, individual. Presentations after."</a:t>
             </a:r>
             <a:endParaRPr lang="en-US" sz="1200" dirty="0"/>
           </a:p>
@@ -3531,7 +4169,7 @@
                 <a:ea typeface="Georgia" pitchFamily="34" charset="-122"/>
                 <a:cs typeface="Georgia" pitchFamily="34" charset="-120"/>
               </a:rPr>
-              <a:t>Part 2: Project Presentations (20 min)</a:t>
+              <a:t>Part 1: Summative Quiz (20 min)</a:t>
             </a:r>
             <a:endParaRPr lang="en-US" sz="1800" dirty="0"/>
           </a:p>
@@ -3545,8 +4183,8 @@
         </p:nvSpPr>
         <p:spPr>
           <a:xfrm>
-            <a:off x="406301" y="870942"/>
-            <a:ext cx="8498026" cy="853083"/>
+            <a:off x="634901" y="883593"/>
+            <a:ext cx="8102798" cy="994172"/>
           </a:xfrm>
           <a:prstGeom prst="rect">
             <a:avLst/>
@@ -3558,17 +4196,15 @@
           <a:bodyPr wrap="square" lIns="0" tIns="0" rIns="0" bIns="0" rtlCol="0" anchor="t"/>
           <a:lstStyle/>
           <a:p>
-            <a:pPr algn="l" indent="0" marL="0">
-              <a:lnSpc>
-                <a:spcPts val="1680"/>
-              </a:lnSpc>
-              <a:spcBef>
-                <a:spcPts val="300"/>
-              </a:spcBef>
-              <a:spcAft>
-                <a:spcPts val="300"/>
-              </a:spcAft>
-              <a:buNone/>
+            <a:pPr algn="l" marL="342900" indent="-342900">
+              <a:lnSpc>
+                <a:spcPts val="1620"/>
+              </a:lnSpc>
+              <a:spcAft>
+                <a:spcPts val="300"/>
+              </a:spcAft>
+              <a:buSzPct val="100000"/>
+              <a:buChar char="•"/>
             </a:pPr>
             <a:r>
               <a:rPr lang="en-US" sz="1200" dirty="0">
@@ -3579,22 +4215,19 @@
                 <a:ea typeface="Arial" pitchFamily="34" charset="-122"/>
                 <a:cs typeface="Arial" pitchFamily="34" charset="-120"/>
               </a:rPr>
-              <a:t>– 3 min presentation + 1 min Q&amp;A per pair. – With ~8–10 pairs in a typical class, you'll fit 5 pairs in the remaining 20 min. </a:t>
+              <a:t>Distribute </a:t>
             </a:r>
             <a:pPr algn="l" indent="0" marL="0">
               <a:lnSpc>
-                <a:spcPts val="1680"/>
-              </a:lnSpc>
-              <a:spcBef>
-                <a:spcPts val="300"/>
-              </a:spcBef>
-              <a:spcAft>
-                <a:spcPts val="300"/>
-              </a:spcAft>
-              <a:buNone/>
-            </a:pPr>
-            <a:r>
-              <a:rPr lang="en-US" sz="1200" b="1" dirty="0">
+                <a:spcPts val="1620"/>
+              </a:lnSpc>
+              <a:spcAft>
+                <a:spcPts val="300"/>
+              </a:spcAft>
+              <a:buNone/>
+            </a:pPr>
+            <a:r>
+              <a:rPr lang="en-US" sz="1200" dirty="0">
                 <a:solidFill>
                   <a:srgbClr val="1C2833"/>
                 </a:solidFill>
@@ -3602,15 +4235,12 @@
                 <a:ea typeface="Arial" pitchFamily="34" charset="-122"/>
                 <a:cs typeface="Arial" pitchFamily="34" charset="-120"/>
               </a:rPr>
-              <a:t>Reserve the next class period for the remaining presentations.</a:t>
+              <a:t>quizzes/summative.md</a:t>
             </a:r>
             <a:pPr algn="l" indent="0" marL="0">
               <a:lnSpc>
-                <a:spcPts val="1680"/>
-              </a:lnSpc>
-              <a:spcBef>
-                <a:spcPts val="300"/>
-              </a:spcBef>
+                <a:spcPts val="1620"/>
+              </a:lnSpc>
               <a:spcAft>
                 <a:spcPts val="300"/>
               </a:spcAft>
@@ -3625,7 +4255,55 @@
                 <a:ea typeface="Arial" pitchFamily="34" charset="-122"/>
                 <a:cs typeface="Arial" pitchFamily="34" charset="-120"/>
               </a:rPr>
-              <a:t> (Note this honestly — Day 10 alone is rarely enough for 10+ pairs.) – During each presentation: – One teacher marks the rubric in real-time. – One audience member is assigned to ask one specific question. – Audience completes a "1 thing I learned, 1 question I have" slip per presentation.</a:t>
+              <a:t>. Closed-book. No discussion.</a:t>
+            </a:r>
+            <a:endParaRPr lang="en-US" sz="1200" dirty="0"/>
+          </a:p>
+          <a:p>
+            <a:pPr algn="l" marL="342900" indent="-342900">
+              <a:lnSpc>
+                <a:spcPts val="1620"/>
+              </a:lnSpc>
+              <a:spcAft>
+                <a:spcPts val="300"/>
+              </a:spcAft>
+              <a:buSzPct val="100000"/>
+              <a:buChar char="•"/>
+            </a:pPr>
+            <a:r>
+              <a:rPr lang="en-US" sz="1200" dirty="0">
+                <a:solidFill>
+                  <a:srgbClr val="1C2833"/>
+                </a:solidFill>
+                <a:latin typeface="Arial" pitchFamily="34" charset="0"/>
+                <a:ea typeface="Arial" pitchFamily="34" charset="-122"/>
+                <a:cs typeface="Arial" pitchFamily="34" charset="-120"/>
+              </a:rPr>
+              <a:t>Quiz covers: element names (Sanskrit + English), creation sequence, quality-count rule, tanmātra-to-sense mapping, one comparison question on pañcabhūta vs. modern science, one open-response on element imbalance.</a:t>
+            </a:r>
+            <a:endParaRPr lang="en-US" sz="1200" dirty="0"/>
+          </a:p>
+          <a:p>
+            <a:pPr algn="l" marL="342900" indent="-342900">
+              <a:lnSpc>
+                <a:spcPts val="1620"/>
+              </a:lnSpc>
+              <a:spcAft>
+                <a:spcPts val="300"/>
+              </a:spcAft>
+              <a:buSzPct val="100000"/>
+              <a:buChar char="•"/>
+            </a:pPr>
+            <a:r>
+              <a:rPr lang="en-US" sz="1200" dirty="0">
+                <a:solidFill>
+                  <a:srgbClr val="1C2833"/>
+                </a:solidFill>
+                <a:latin typeface="Arial" pitchFamily="34" charset="0"/>
+                <a:ea typeface="Arial" pitchFamily="34" charset="-122"/>
+                <a:cs typeface="Arial" pitchFamily="34" charset="-120"/>
+              </a:rPr>
+              <a:t>Collect quizzes at 20-min mark.</a:t>
             </a:r>
             <a:endParaRPr lang="en-US" sz="1200" dirty="0"/>
           </a:p>
@@ -3783,7 +4461,7 @@
                 <a:ea typeface="Georgia" pitchFamily="34" charset="-122"/>
                 <a:cs typeface="Georgia" pitchFamily="34" charset="-120"/>
               </a:rPr>
-              <a:t>Wrap-up (2 min)</a:t>
+              <a:t>Part 2: Project Presentations (20 min)</a:t>
             </a:r>
             <a:endParaRPr lang="en-US" sz="1800" dirty="0"/>
           </a:p>
@@ -3797,8 +4475,8 @@
         </p:nvSpPr>
         <p:spPr>
           <a:xfrm>
-            <a:off x="406301" y="870942"/>
-            <a:ext cx="8498026" cy="436066"/>
+            <a:off x="634901" y="883593"/>
+            <a:ext cx="8102798" cy="1706463"/>
           </a:xfrm>
           <a:prstGeom prst="rect">
             <a:avLst/>
@@ -3810,17 +4488,15 @@
           <a:bodyPr wrap="square" lIns="0" tIns="0" rIns="0" bIns="0" rtlCol="0" anchor="t"/>
           <a:lstStyle/>
           <a:p>
-            <a:pPr algn="l" indent="0" marL="0">
-              <a:lnSpc>
-                <a:spcPts val="1680"/>
-              </a:lnSpc>
-              <a:spcBef>
-                <a:spcPts val="300"/>
-              </a:spcBef>
-              <a:spcAft>
-                <a:spcPts val="300"/>
-              </a:spcAft>
-              <a:buNone/>
+            <a:pPr algn="l" marL="342900" indent="-342900">
+              <a:lnSpc>
+                <a:spcPts val="1620"/>
+              </a:lnSpc>
+              <a:spcAft>
+                <a:spcPts val="300"/>
+              </a:spcAft>
+              <a:buSzPct val="100000"/>
+              <a:buChar char="•"/>
             </a:pPr>
             <a:r>
               <a:rPr lang="en-US" sz="1200" dirty="0">
@@ -3831,22 +4507,23 @@
                 <a:ea typeface="Arial" pitchFamily="34" charset="-122"/>
                 <a:cs typeface="Arial" pitchFamily="34" charset="-120"/>
               </a:rPr>
-              <a:t>– Thank the class. – Closing question (oral, voluntary): </a:t>
-            </a:r>
-            <a:pPr algn="l" indent="0" marL="0">
-              <a:lnSpc>
-                <a:spcPts val="1680"/>
-              </a:lnSpc>
-              <a:spcBef>
-                <a:spcPts val="300"/>
-              </a:spcBef>
-              <a:spcAft>
-                <a:spcPts val="300"/>
-              </a:spcAft>
-              <a:buNone/>
-            </a:pPr>
-            <a:r>
-              <a:rPr lang="en-US" sz="1200" i="1" dirty="0">
+              <a:t>3 min presentation + 1 min Q&amp;A per pair.</a:t>
+            </a:r>
+            <a:endParaRPr lang="en-US" sz="1200" dirty="0"/>
+          </a:p>
+          <a:p>
+            <a:pPr algn="l" marL="342900" indent="-342900">
+              <a:lnSpc>
+                <a:spcPts val="1620"/>
+              </a:lnSpc>
+              <a:spcAft>
+                <a:spcPts val="300"/>
+              </a:spcAft>
+              <a:buSzPct val="100000"/>
+              <a:buChar char="•"/>
+            </a:pPr>
+            <a:r>
+              <a:rPr lang="en-US" sz="1200" dirty="0">
                 <a:solidFill>
                   <a:srgbClr val="1C2833"/>
                 </a:solidFill>
@@ -3854,22 +4531,19 @@
                 <a:ea typeface="Arial" pitchFamily="34" charset="-122"/>
                 <a:cs typeface="Arial" pitchFamily="34" charset="-120"/>
               </a:rPr>
-              <a:t>"What's one thing you'll keep noticing after this module ends?"</a:t>
+              <a:t>With ~8–10 pairs in a typical class, you'll fit 5 pairs in the remaining 20 min. </a:t>
             </a:r>
             <a:pPr algn="l" indent="0" marL="0">
               <a:lnSpc>
-                <a:spcPts val="1680"/>
-              </a:lnSpc>
-              <a:spcBef>
-                <a:spcPts val="300"/>
-              </a:spcBef>
-              <a:spcAft>
-                <a:spcPts val="300"/>
-              </a:spcAft>
-              <a:buNone/>
-            </a:pPr>
-            <a:r>
-              <a:rPr lang="en-US" sz="1200" dirty="0">
+                <a:spcPts val="1620"/>
+              </a:lnSpc>
+              <a:spcAft>
+                <a:spcPts val="300"/>
+              </a:spcAft>
+              <a:buNone/>
+            </a:pPr>
+            <a:r>
+              <a:rPr lang="en-US" sz="1200" b="1" dirty="0">
                 <a:solidFill>
                   <a:srgbClr val="1C2833"/>
                 </a:solidFill>
@@ -3877,15 +4551,12 @@
                 <a:ea typeface="Arial" pitchFamily="34" charset="-122"/>
                 <a:cs typeface="Arial" pitchFamily="34" charset="-120"/>
               </a:rPr>
-              <a:t> – Reflection slip due: students answer the three reflection questions from </a:t>
+              <a:t>Reserve the next class period for the remaining presentations.</a:t>
             </a:r>
             <a:pPr algn="l" indent="0" marL="0">
               <a:lnSpc>
-                <a:spcPts val="1680"/>
-              </a:lnSpc>
-              <a:spcBef>
-                <a:spcPts val="300"/>
-              </a:spcBef>
+                <a:spcPts val="1620"/>
+              </a:lnSpc>
               <a:spcAft>
                 <a:spcPts val="300"/>
               </a:spcAft>
@@ -3900,19 +4571,20 @@
                 <a:ea typeface="Arial" pitchFamily="34" charset="-122"/>
                 <a:cs typeface="Arial" pitchFamily="34" charset="-120"/>
               </a:rPr>
-              <a:t>assessments/project-brief.md</a:t>
-            </a:r>
-            <a:pPr algn="l" indent="0" marL="0">
-              <a:lnSpc>
-                <a:spcPts val="1680"/>
-              </a:lnSpc>
-              <a:spcBef>
-                <a:spcPts val="300"/>
-              </a:spcBef>
-              <a:spcAft>
-                <a:spcPts val="300"/>
-              </a:spcAft>
-              <a:buNone/>
+              <a:t> (Note this honestly — Day 10 alone is rarely enough for 10+ pairs.)</a:t>
+            </a:r>
+            <a:endParaRPr lang="en-US" sz="1200" dirty="0"/>
+          </a:p>
+          <a:p>
+            <a:pPr algn="l" marL="342900" indent="-342900">
+              <a:lnSpc>
+                <a:spcPts val="1620"/>
+              </a:lnSpc>
+              <a:spcAft>
+                <a:spcPts val="300"/>
+              </a:spcAft>
+              <a:buSzPct val="100000"/>
+              <a:buChar char="•"/>
             </a:pPr>
             <a:r>
               <a:rPr lang="en-US" sz="1200" dirty="0">
@@ -3923,7 +4595,79 @@
                 <a:ea typeface="Arial" pitchFamily="34" charset="-122"/>
                 <a:cs typeface="Arial" pitchFamily="34" charset="-120"/>
               </a:rPr>
-              <a:t>.</a:t>
+              <a:t>During each presentation:</a:t>
+            </a:r>
+            <a:endParaRPr lang="en-US" sz="1200" dirty="0"/>
+          </a:p>
+          <a:p>
+            <a:pPr algn="l" marL="342900" indent="-342900">
+              <a:lnSpc>
+                <a:spcPts val="1620"/>
+              </a:lnSpc>
+              <a:spcAft>
+                <a:spcPts val="300"/>
+              </a:spcAft>
+              <a:buSzPct val="100000"/>
+              <a:buChar char="•"/>
+            </a:pPr>
+            <a:r>
+              <a:rPr lang="en-US" sz="1200" dirty="0">
+                <a:solidFill>
+                  <a:srgbClr val="1C2833"/>
+                </a:solidFill>
+                <a:latin typeface="Arial" pitchFamily="34" charset="0"/>
+                <a:ea typeface="Arial" pitchFamily="34" charset="-122"/>
+                <a:cs typeface="Arial" pitchFamily="34" charset="-120"/>
+              </a:rPr>
+              <a:t>One teacher marks the rubric in real-time.</a:t>
+            </a:r>
+            <a:endParaRPr lang="en-US" sz="1200" dirty="0"/>
+          </a:p>
+          <a:p>
+            <a:pPr algn="l" marL="342900" indent="-342900">
+              <a:lnSpc>
+                <a:spcPts val="1620"/>
+              </a:lnSpc>
+              <a:spcAft>
+                <a:spcPts val="300"/>
+              </a:spcAft>
+              <a:buSzPct val="100000"/>
+              <a:buChar char="•"/>
+            </a:pPr>
+            <a:r>
+              <a:rPr lang="en-US" sz="1200" dirty="0">
+                <a:solidFill>
+                  <a:srgbClr val="1C2833"/>
+                </a:solidFill>
+                <a:latin typeface="Arial" pitchFamily="34" charset="0"/>
+                <a:ea typeface="Arial" pitchFamily="34" charset="-122"/>
+                <a:cs typeface="Arial" pitchFamily="34" charset="-120"/>
+              </a:rPr>
+              <a:t>One audience member is assigned to ask one specific question.</a:t>
+            </a:r>
+            <a:endParaRPr lang="en-US" sz="1200" dirty="0"/>
+          </a:p>
+          <a:p>
+            <a:pPr algn="l" marL="342900" indent="-342900">
+              <a:lnSpc>
+                <a:spcPts val="1620"/>
+              </a:lnSpc>
+              <a:spcAft>
+                <a:spcPts val="300"/>
+              </a:spcAft>
+              <a:buSzPct val="100000"/>
+              <a:buChar char="•"/>
+            </a:pPr>
+            <a:r>
+              <a:rPr lang="en-US" sz="1200" dirty="0">
+                <a:solidFill>
+                  <a:srgbClr val="1C2833"/>
+                </a:solidFill>
+                <a:latin typeface="Arial" pitchFamily="34" charset="0"/>
+                <a:ea typeface="Arial" pitchFamily="34" charset="-122"/>
+                <a:cs typeface="Arial" pitchFamily="34" charset="-120"/>
+              </a:rPr>
+              <a:t>Audience completes a "1 thing I learned, 1 question I have" slip per presentation.</a:t>
             </a:r>
             <a:endParaRPr lang="en-US" sz="1200" dirty="0"/>
           </a:p>
@@ -4081,7 +4825,7 @@
                 <a:ea typeface="Georgia" pitchFamily="34" charset="-122"/>
                 <a:cs typeface="Georgia" pitchFamily="34" charset="-120"/>
               </a:rPr>
-              <a:t>Homework</a:t>
+              <a:t>Wrap-up (2 min)</a:t>
             </a:r>
             <a:endParaRPr lang="en-US" sz="1800" dirty="0"/>
           </a:p>
@@ -4095,8 +4839,8 @@
         </p:nvSpPr>
         <p:spPr>
           <a:xfrm>
-            <a:off x="406301" y="870942"/>
-            <a:ext cx="8498026" cy="426541"/>
+            <a:off x="634901" y="883593"/>
+            <a:ext cx="8102798" cy="788491"/>
           </a:xfrm>
           <a:prstGeom prst="rect">
             <a:avLst/>
@@ -4108,17 +4852,15 @@
           <a:bodyPr wrap="square" lIns="0" tIns="0" rIns="0" bIns="0" rtlCol="0" anchor="t"/>
           <a:lstStyle/>
           <a:p>
-            <a:pPr algn="l" indent="0" marL="0">
-              <a:lnSpc>
-                <a:spcPts val="1680"/>
-              </a:lnSpc>
-              <a:spcBef>
-                <a:spcPts val="300"/>
-              </a:spcBef>
-              <a:spcAft>
-                <a:spcPts val="300"/>
-              </a:spcAft>
-              <a:buNone/>
+            <a:pPr algn="l" marL="342900" indent="-342900">
+              <a:lnSpc>
+                <a:spcPts val="1620"/>
+              </a:lnSpc>
+              <a:spcAft>
+                <a:spcPts val="300"/>
+              </a:spcAft>
+              <a:buSzPct val="100000"/>
+              <a:buChar char="•"/>
             </a:pPr>
             <a:r>
               <a:rPr lang="en-US" sz="1200" dirty="0">
@@ -4129,7 +4871,115 @@
                 <a:ea typeface="Arial" pitchFamily="34" charset="-122"/>
                 <a:cs typeface="Arial" pitchFamily="34" charset="-120"/>
               </a:rPr>
-              <a:t>– None. The module is complete. (Begin the next module's prerequisite reading if your sequence flows directly into another.)</a:t>
+              <a:t>Thank the class.</a:t>
+            </a:r>
+            <a:endParaRPr lang="en-US" sz="1200" dirty="0"/>
+          </a:p>
+          <a:p>
+            <a:pPr algn="l" marL="342900" indent="-342900">
+              <a:lnSpc>
+                <a:spcPts val="1620"/>
+              </a:lnSpc>
+              <a:spcAft>
+                <a:spcPts val="300"/>
+              </a:spcAft>
+              <a:buSzPct val="100000"/>
+              <a:buChar char="•"/>
+            </a:pPr>
+            <a:r>
+              <a:rPr lang="en-US" sz="1200" dirty="0">
+                <a:solidFill>
+                  <a:srgbClr val="1C2833"/>
+                </a:solidFill>
+                <a:latin typeface="Arial" pitchFamily="34" charset="0"/>
+                <a:ea typeface="Arial" pitchFamily="34" charset="-122"/>
+                <a:cs typeface="Arial" pitchFamily="34" charset="-120"/>
+              </a:rPr>
+              <a:t>Closing question (oral, voluntary): </a:t>
+            </a:r>
+            <a:pPr algn="l" indent="0" marL="0">
+              <a:lnSpc>
+                <a:spcPts val="1620"/>
+              </a:lnSpc>
+              <a:spcAft>
+                <a:spcPts val="300"/>
+              </a:spcAft>
+              <a:buNone/>
+            </a:pPr>
+            <a:r>
+              <a:rPr lang="en-US" sz="1200" i="1" dirty="0">
+                <a:solidFill>
+                  <a:srgbClr val="1C2833"/>
+                </a:solidFill>
+                <a:latin typeface="Arial" pitchFamily="34" charset="0"/>
+                <a:ea typeface="Arial" pitchFamily="34" charset="-122"/>
+                <a:cs typeface="Arial" pitchFamily="34" charset="-120"/>
+              </a:rPr>
+              <a:t>"What's one thing you'll keep noticing after this module ends?"</a:t>
+            </a:r>
+            <a:endParaRPr lang="en-US" sz="1200" dirty="0"/>
+          </a:p>
+          <a:p>
+            <a:pPr algn="l" marL="342900" indent="-342900">
+              <a:lnSpc>
+                <a:spcPts val="1620"/>
+              </a:lnSpc>
+              <a:spcAft>
+                <a:spcPts val="300"/>
+              </a:spcAft>
+              <a:buSzPct val="100000"/>
+              <a:buChar char="•"/>
+            </a:pPr>
+            <a:r>
+              <a:rPr lang="en-US" sz="1200" dirty="0">
+                <a:solidFill>
+                  <a:srgbClr val="1C2833"/>
+                </a:solidFill>
+                <a:latin typeface="Arial" pitchFamily="34" charset="0"/>
+                <a:ea typeface="Arial" pitchFamily="34" charset="-122"/>
+                <a:cs typeface="Arial" pitchFamily="34" charset="-120"/>
+              </a:rPr>
+              <a:t>Reflection slip due: students answer the three reflection questions from </a:t>
+            </a:r>
+            <a:pPr algn="l" indent="0" marL="0">
+              <a:lnSpc>
+                <a:spcPts val="1620"/>
+              </a:lnSpc>
+              <a:spcAft>
+                <a:spcPts val="300"/>
+              </a:spcAft>
+              <a:buNone/>
+            </a:pPr>
+            <a:r>
+              <a:rPr lang="en-US" sz="1200" dirty="0">
+                <a:solidFill>
+                  <a:srgbClr val="1C2833"/>
+                </a:solidFill>
+                <a:latin typeface="Arial" pitchFamily="34" charset="0"/>
+                <a:ea typeface="Arial" pitchFamily="34" charset="-122"/>
+                <a:cs typeface="Arial" pitchFamily="34" charset="-120"/>
+              </a:rPr>
+              <a:t>assessments/project-brief.md</a:t>
+            </a:r>
+            <a:pPr algn="l" indent="0" marL="0">
+              <a:lnSpc>
+                <a:spcPts val="1620"/>
+              </a:lnSpc>
+              <a:spcAft>
+                <a:spcPts val="300"/>
+              </a:spcAft>
+              <a:buNone/>
+            </a:pPr>
+            <a:r>
+              <a:rPr lang="en-US" sz="1200" dirty="0">
+                <a:solidFill>
+                  <a:srgbClr val="1C2833"/>
+                </a:solidFill>
+                <a:latin typeface="Arial" pitchFamily="34" charset="0"/>
+                <a:ea typeface="Arial" pitchFamily="34" charset="-122"/>
+                <a:cs typeface="Arial" pitchFamily="34" charset="-120"/>
+              </a:rPr>
+              <a:t>.</a:t>
             </a:r>
             <a:endParaRPr lang="en-US" sz="1200" dirty="0"/>
           </a:p>
@@ -4287,7 +5137,7 @@
                 <a:ea typeface="Georgia" pitchFamily="34" charset="-122"/>
                 <a:cs typeface="Georgia" pitchFamily="34" charset="-120"/>
               </a:rPr>
-              <a:t>Differentiation</a:t>
+              <a:t>Student-facing content</a:t>
             </a:r>
             <a:endParaRPr lang="en-US" sz="1800" dirty="0"/>
           </a:p>
@@ -4301,8 +5151,61 @@
         </p:nvSpPr>
         <p:spPr>
           <a:xfrm>
-            <a:off x="634901" y="883593"/>
-            <a:ext cx="8102798" cy="731341"/>
+            <a:off x="406301" y="883593"/>
+            <a:ext cx="8331398" cy="2726531"/>
+          </a:xfrm>
+          <a:prstGeom prst="rect">
+            <a:avLst/>
+          </a:prstGeom>
+          <a:solidFill>
+            <a:srgbClr val="F4F8F9"/>
+          </a:solidFill>
+          <a:ln/>
+        </p:spPr>
+        <p:txBody>
+          <a:bodyPr wrap="square" rtlCol="0" anchor="ctr"/>
+          <a:lstStyle/>
+          <a:p>
+            <a:pPr indent="0" marL="0">
+              <a:buNone/>
+            </a:pPr>
+            <a:endParaRPr lang="en-US" dirty="0"/>
+          </a:p>
+        </p:txBody>
+      </p:sp>
+      <p:sp>
+        <p:nvSpPr>
+          <p:cNvPr id="5" name="Shape 3"/>
+          <p:cNvSpPr/>
+          <p:nvPr/>
+        </p:nvSpPr>
+        <p:spPr>
+          <a:xfrm>
+            <a:off x="434876" y="883593"/>
+            <a:ext cx="0" cy="2726531"/>
+          </a:xfrm>
+          <a:prstGeom prst="line">
+            <a:avLst/>
+          </a:prstGeom>
+          <a:noFill/>
+          <a:ln w="57150">
+            <a:solidFill>
+              <a:srgbClr val="FE4447"/>
+            </a:solidFill>
+            <a:prstDash val="solid"/>
+          </a:ln>
+        </p:spPr>
+      </p:sp>
+      <p:sp>
+        <p:nvSpPr>
+          <p:cNvPr id="6" name="Text 4"/>
+          <p:cNvSpPr/>
+          <p:nvPr/>
+        </p:nvSpPr>
+        <p:spPr>
+          <a:xfrm>
+            <a:off x="692051" y="1074093"/>
+            <a:ext cx="7973389" cy="230981"/>
           </a:xfrm>
           <a:prstGeom prst="rect">
             <a:avLst/>
@@ -4314,98 +5217,372 @@
           <a:bodyPr wrap="square" lIns="0" tIns="0" rIns="0" bIns="0" rtlCol="0" anchor="t"/>
           <a:lstStyle/>
           <a:p>
-            <a:pPr algn="l" marL="342900" indent="-342900">
-              <a:lnSpc>
-                <a:spcPts val="1620"/>
-              </a:lnSpc>
-              <a:spcAft>
-                <a:spcPts val="300"/>
-              </a:spcAft>
-              <a:buSzPct val="100000"/>
-              <a:buChar char="•"/>
-            </a:pPr>
-            <a:r>
-              <a:rPr lang="en-US" sz="1200" b="1" dirty="0">
-                <a:solidFill>
-                  <a:srgbClr val="1C2833"/>
-                </a:solidFill>
-                <a:latin typeface="Arial" pitchFamily="34" charset="0"/>
-                <a:ea typeface="Arial" pitchFamily="34" charset="-122"/>
-                <a:cs typeface="Arial" pitchFamily="34" charset="-120"/>
-              </a:rPr>
-              <a:t>One tier up:</a:t>
-            </a:r>
             <a:pPr algn="l" indent="0" marL="0">
               <a:lnSpc>
-                <a:spcPts val="1620"/>
-              </a:lnSpc>
-              <a:spcAft>
-                <a:spcPts val="300"/>
-              </a:spcAft>
-              <a:buNone/>
-            </a:pPr>
-            <a:r>
-              <a:rPr lang="en-US" sz="1200" dirty="0">
-                <a:solidFill>
-                  <a:srgbClr val="1C2833"/>
-                </a:solidFill>
-                <a:latin typeface="Arial" pitchFamily="34" charset="0"/>
-                <a:ea typeface="Arial" pitchFamily="34" charset="-122"/>
-                <a:cs typeface="Arial" pitchFamily="34" charset="-120"/>
-              </a:rPr>
-              <a:t> A student who finishes the quiz early can write a 1-paragraph "what would Module 2 look like for a class of Grade 11 students?" — useful input for the Senior-band pack.</a:t>
-            </a:r>
-            <a:endParaRPr lang="en-US" sz="1200" dirty="0"/>
-          </a:p>
-          <a:p>
-            <a:pPr algn="l" marL="342900" indent="-342900">
-              <a:lnSpc>
-                <a:spcPts val="1620"/>
-              </a:lnSpc>
-              <a:spcAft>
-                <a:spcPts val="300"/>
-              </a:spcAft>
-              <a:buSzPct val="100000"/>
-              <a:buChar char="•"/>
-            </a:pPr>
-            <a:r>
-              <a:rPr lang="en-US" sz="1200" b="1" dirty="0">
-                <a:solidFill>
-                  <a:srgbClr val="1C2833"/>
-                </a:solidFill>
-                <a:latin typeface="Arial" pitchFamily="34" charset="0"/>
-                <a:ea typeface="Arial" pitchFamily="34" charset="-122"/>
-                <a:cs typeface="Arial" pitchFamily="34" charset="-120"/>
-              </a:rPr>
-              <a:t>One tier down:</a:t>
-            </a:r>
+                <a:spcPts val="1820"/>
+              </a:lnSpc>
+              <a:spcBef>
+                <a:spcPts val="300"/>
+              </a:spcBef>
+              <a:spcAft>
+                <a:spcPts val="300"/>
+              </a:spcAft>
+              <a:buNone/>
+            </a:pPr>
+            <a:r>
+              <a:rPr lang="en-US" sz="1300" b="1" i="1" dirty="0">
+                <a:solidFill>
+                  <a:srgbClr val="1C2833"/>
+                </a:solidFill>
+                <a:latin typeface="Georgia" pitchFamily="34" charset="0"/>
+                <a:ea typeface="Georgia" pitchFamily="34" charset="-122"/>
+                <a:cs typeface="Georgia" pitchFamily="34" charset="-120"/>
+              </a:rPr>
+              <a:t>Today: quiz + presentations</a:t>
+            </a:r>
+            <a:endParaRPr lang="en-US" sz="1300" dirty="0"/>
+          </a:p>
+        </p:txBody>
+      </p:sp>
+      <p:sp>
+        <p:nvSpPr>
+          <p:cNvPr id="7" name="Text 5"/>
+          <p:cNvSpPr/>
+          <p:nvPr/>
+        </p:nvSpPr>
+        <p:spPr>
+          <a:xfrm>
+            <a:off x="692051" y="1343174"/>
+            <a:ext cx="7973389" cy="230981"/>
+          </a:xfrm>
+          <a:prstGeom prst="rect">
+            <a:avLst/>
+          </a:prstGeom>
+          <a:noFill/>
+          <a:ln/>
+        </p:spPr>
+        <p:txBody>
+          <a:bodyPr wrap="square" lIns="0" tIns="0" rIns="0" bIns="0" rtlCol="0" anchor="t"/>
+          <a:lstStyle/>
+          <a:p>
             <a:pPr algn="l" indent="0" marL="0">
               <a:lnSpc>
-                <a:spcPts val="1620"/>
-              </a:lnSpc>
-              <a:spcAft>
-                <a:spcPts val="300"/>
-              </a:spcAft>
-              <a:buNone/>
-            </a:pPr>
-            <a:r>
-              <a:rPr lang="en-US" sz="1200" dirty="0">
-                <a:solidFill>
-                  <a:srgbClr val="1C2833"/>
-                </a:solidFill>
-                <a:latin typeface="Arial" pitchFamily="34" charset="0"/>
-                <a:ea typeface="Arial" pitchFamily="34" charset="-122"/>
-                <a:cs typeface="Arial" pitchFamily="34" charset="-120"/>
-              </a:rPr>
-              <a:t> Allow the quiz to be open-notebook for a student with documented learning needs — your call.</a:t>
-            </a:r>
-            <a:endParaRPr lang="en-US" sz="1200" dirty="0"/>
-          </a:p>
-        </p:txBody>
-      </p:sp>
-      <p:sp>
-        <p:nvSpPr>
-          <p:cNvPr id="5" name="Text 3"/>
+                <a:spcPts val="1820"/>
+              </a:lnSpc>
+              <a:spcBef>
+                <a:spcPts val="300"/>
+              </a:spcBef>
+              <a:spcAft>
+                <a:spcPts val="300"/>
+              </a:spcAft>
+              <a:buNone/>
+            </a:pPr>
+            <a:r>
+              <a:rPr lang="en-US" sz="1300" i="1" dirty="0">
+                <a:solidFill>
+                  <a:srgbClr val="1C2833"/>
+                </a:solidFill>
+                <a:latin typeface="Georgia" pitchFamily="34" charset="0"/>
+                <a:ea typeface="Georgia" pitchFamily="34" charset="-122"/>
+                <a:cs typeface="Georgia" pitchFamily="34" charset="-120"/>
+              </a:rPr>
+              <a:t>20 minutes for the summative quiz — closed book.</a:t>
+            </a:r>
+            <a:endParaRPr lang="en-US" sz="1300" dirty="0"/>
+          </a:p>
+        </p:txBody>
+      </p:sp>
+      <p:sp>
+        <p:nvSpPr>
+          <p:cNvPr id="8" name="Text 6"/>
+          <p:cNvSpPr/>
+          <p:nvPr/>
+        </p:nvSpPr>
+        <p:spPr>
+          <a:xfrm>
+            <a:off x="692051" y="1612255"/>
+            <a:ext cx="7973389" cy="230981"/>
+          </a:xfrm>
+          <a:prstGeom prst="rect">
+            <a:avLst/>
+          </a:prstGeom>
+          <a:noFill/>
+          <a:ln/>
+        </p:spPr>
+        <p:txBody>
+          <a:bodyPr wrap="square" lIns="0" tIns="0" rIns="0" bIns="0" rtlCol="0" anchor="t"/>
+          <a:lstStyle/>
+          <a:p>
+            <a:pPr algn="l" indent="0" marL="0">
+              <a:lnSpc>
+                <a:spcPts val="1820"/>
+              </a:lnSpc>
+              <a:spcBef>
+                <a:spcPts val="300"/>
+              </a:spcBef>
+              <a:spcAft>
+                <a:spcPts val="300"/>
+              </a:spcAft>
+              <a:buNone/>
+            </a:pPr>
+            <a:r>
+              <a:rPr lang="en-US" sz="1300" i="1" dirty="0">
+                <a:solidFill>
+                  <a:srgbClr val="1C2833"/>
+                </a:solidFill>
+                <a:latin typeface="Georgia" pitchFamily="34" charset="0"/>
+                <a:ea typeface="Georgia" pitchFamily="34" charset="-122"/>
+                <a:cs typeface="Georgia" pitchFamily="34" charset="-120"/>
+              </a:rPr>
+              <a:t>3-minute presentation per pair, then 1 minute of audience questions.</a:t>
+            </a:r>
+            <a:endParaRPr lang="en-US" sz="1300" dirty="0"/>
+          </a:p>
+        </p:txBody>
+      </p:sp>
+      <p:sp>
+        <p:nvSpPr>
+          <p:cNvPr id="9" name="Text 7"/>
+          <p:cNvSpPr/>
+          <p:nvPr/>
+        </p:nvSpPr>
+        <p:spPr>
+          <a:xfrm>
+            <a:off x="692051" y="1881336"/>
+            <a:ext cx="7973389" cy="461963"/>
+          </a:xfrm>
+          <a:prstGeom prst="rect">
+            <a:avLst/>
+          </a:prstGeom>
+          <a:noFill/>
+          <a:ln/>
+        </p:spPr>
+        <p:txBody>
+          <a:bodyPr wrap="square" lIns="0" tIns="0" rIns="0" bIns="0" rtlCol="0" anchor="t"/>
+          <a:lstStyle/>
+          <a:p>
+            <a:pPr algn="l" indent="0" marL="0">
+              <a:lnSpc>
+                <a:spcPts val="1820"/>
+              </a:lnSpc>
+              <a:spcBef>
+                <a:spcPts val="300"/>
+              </a:spcBef>
+              <a:spcAft>
+                <a:spcPts val="300"/>
+              </a:spcAft>
+              <a:buNone/>
+            </a:pPr>
+            <a:r>
+              <a:rPr lang="en-US" sz="1300" i="1" dirty="0">
+                <a:solidFill>
+                  <a:srgbClr val="1C2833"/>
+                </a:solidFill>
+                <a:latin typeface="Georgia" pitchFamily="34" charset="0"/>
+                <a:ea typeface="Georgia" pitchFamily="34" charset="-122"/>
+                <a:cs typeface="Georgia" pitchFamily="34" charset="-120"/>
+              </a:rPr>
+              <a:t>When you're in the audience, fill out one "I learned / I wonder" slip per presentation. These go to the presenters and help them know what landed.</a:t>
+            </a:r>
+            <a:endParaRPr lang="en-US" sz="1300" dirty="0"/>
+          </a:p>
+        </p:txBody>
+      </p:sp>
+      <p:sp>
+        <p:nvSpPr>
+          <p:cNvPr id="10" name="Text 8"/>
+          <p:cNvSpPr/>
+          <p:nvPr/>
+        </p:nvSpPr>
+        <p:spPr>
+          <a:xfrm>
+            <a:off x="692051" y="2381399"/>
+            <a:ext cx="7973389" cy="230981"/>
+          </a:xfrm>
+          <a:prstGeom prst="rect">
+            <a:avLst/>
+          </a:prstGeom>
+          <a:noFill/>
+          <a:ln/>
+        </p:spPr>
+        <p:txBody>
+          <a:bodyPr wrap="square" lIns="0" tIns="0" rIns="0" bIns="0" rtlCol="0" anchor="t"/>
+          <a:lstStyle/>
+          <a:p>
+            <a:pPr algn="l" indent="0" marL="0">
+              <a:lnSpc>
+                <a:spcPts val="1820"/>
+              </a:lnSpc>
+              <a:spcBef>
+                <a:spcPts val="300"/>
+              </a:spcBef>
+              <a:spcAft>
+                <a:spcPts val="300"/>
+              </a:spcAft>
+              <a:buNone/>
+            </a:pPr>
+            <a:r>
+              <a:rPr lang="en-US" sz="1300" b="1" i="1" dirty="0">
+                <a:solidFill>
+                  <a:srgbClr val="1C2833"/>
+                </a:solidFill>
+                <a:latin typeface="Georgia" pitchFamily="34" charset="0"/>
+                <a:ea typeface="Georgia" pitchFamily="34" charset="-122"/>
+                <a:cs typeface="Georgia" pitchFamily="34" charset="-120"/>
+              </a:rPr>
+              <a:t>Reflection (due at the end of class):</a:t>
+            </a:r>
+            <a:endParaRPr lang="en-US" sz="1300" dirty="0"/>
+          </a:p>
+        </p:txBody>
+      </p:sp>
+      <p:sp>
+        <p:nvSpPr>
+          <p:cNvPr id="11" name="Text 9"/>
+          <p:cNvSpPr/>
+          <p:nvPr/>
+        </p:nvSpPr>
+        <p:spPr>
+          <a:xfrm>
+            <a:off x="692051" y="2650480"/>
+            <a:ext cx="7973389" cy="230981"/>
+          </a:xfrm>
+          <a:prstGeom prst="rect">
+            <a:avLst/>
+          </a:prstGeom>
+          <a:noFill/>
+          <a:ln/>
+        </p:spPr>
+        <p:txBody>
+          <a:bodyPr wrap="square" lIns="0" tIns="0" rIns="0" bIns="0" rtlCol="0" anchor="t"/>
+          <a:lstStyle/>
+          <a:p>
+            <a:pPr algn="l" indent="0" marL="0">
+              <a:lnSpc>
+                <a:spcPts val="1820"/>
+              </a:lnSpc>
+              <a:spcBef>
+                <a:spcPts val="300"/>
+              </a:spcBef>
+              <a:spcAft>
+                <a:spcPts val="300"/>
+              </a:spcAft>
+              <a:buNone/>
+            </a:pPr>
+            <a:r>
+              <a:rPr lang="en-US" sz="1300" i="1" dirty="0">
+                <a:solidFill>
+                  <a:srgbClr val="1C2833"/>
+                </a:solidFill>
+                <a:latin typeface="Georgia" pitchFamily="34" charset="0"/>
+                <a:ea typeface="Georgia" pitchFamily="34" charset="-122"/>
+                <a:cs typeface="Georgia" pitchFamily="34" charset="-120"/>
+              </a:rPr>
+              <a:t>What did you set out to learn or make, and what did you actually end up with?</a:t>
+            </a:r>
+            <a:endParaRPr lang="en-US" sz="1300" dirty="0"/>
+          </a:p>
+        </p:txBody>
+      </p:sp>
+      <p:sp>
+        <p:nvSpPr>
+          <p:cNvPr id="12" name="Text 10"/>
+          <p:cNvSpPr/>
+          <p:nvPr/>
+        </p:nvSpPr>
+        <p:spPr>
+          <a:xfrm>
+            <a:off x="692051" y="2919561"/>
+            <a:ext cx="7973389" cy="230981"/>
+          </a:xfrm>
+          <a:prstGeom prst="rect">
+            <a:avLst/>
+          </a:prstGeom>
+          <a:noFill/>
+          <a:ln/>
+        </p:spPr>
+        <p:txBody>
+          <a:bodyPr wrap="square" lIns="0" tIns="0" rIns="0" bIns="0" rtlCol="0" anchor="t"/>
+          <a:lstStyle/>
+          <a:p>
+            <a:pPr algn="l" indent="0" marL="0">
+              <a:lnSpc>
+                <a:spcPts val="1820"/>
+              </a:lnSpc>
+              <a:spcBef>
+                <a:spcPts val="300"/>
+              </a:spcBef>
+              <a:spcAft>
+                <a:spcPts val="300"/>
+              </a:spcAft>
+              <a:buNone/>
+            </a:pPr>
+            <a:r>
+              <a:rPr lang="en-US" sz="1300" i="1" dirty="0">
+                <a:solidFill>
+                  <a:srgbClr val="1C2833"/>
+                </a:solidFill>
+                <a:latin typeface="Georgia" pitchFamily="34" charset="0"/>
+                <a:ea typeface="Georgia" pitchFamily="34" charset="-122"/>
+                <a:cs typeface="Georgia" pitchFamily="34" charset="-120"/>
+              </a:rPr>
+              <a:t>What is the most surprising thing you discovered while making this?</a:t>
+            </a:r>
+            <a:endParaRPr lang="en-US" sz="1300" dirty="0"/>
+          </a:p>
+        </p:txBody>
+      </p:sp>
+      <p:sp>
+        <p:nvSpPr>
+          <p:cNvPr id="13" name="Text 11"/>
+          <p:cNvSpPr/>
+          <p:nvPr/>
+        </p:nvSpPr>
+        <p:spPr>
+          <a:xfrm>
+            <a:off x="692051" y="3188643"/>
+            <a:ext cx="7973389" cy="230981"/>
+          </a:xfrm>
+          <a:prstGeom prst="rect">
+            <a:avLst/>
+          </a:prstGeom>
+          <a:noFill/>
+          <a:ln/>
+        </p:spPr>
+        <p:txBody>
+          <a:bodyPr wrap="square" lIns="0" tIns="0" rIns="0" bIns="0" rtlCol="0" anchor="t"/>
+          <a:lstStyle/>
+          <a:p>
+            <a:pPr algn="l" indent="0" marL="0">
+              <a:lnSpc>
+                <a:spcPts val="1820"/>
+              </a:lnSpc>
+              <a:spcBef>
+                <a:spcPts val="300"/>
+              </a:spcBef>
+              <a:spcAft>
+                <a:spcPts val="300"/>
+              </a:spcAft>
+              <a:buNone/>
+            </a:pPr>
+            <a:r>
+              <a:rPr lang="en-US" sz="1300" i="1" dirty="0">
+                <a:solidFill>
+                  <a:srgbClr val="1C2833"/>
+                </a:solidFill>
+                <a:latin typeface="Georgia" pitchFamily="34" charset="0"/>
+                <a:ea typeface="Georgia" pitchFamily="34" charset="-122"/>
+                <a:cs typeface="Georgia" pitchFamily="34" charset="-120"/>
+              </a:rPr>
+              <a:t>If you had three more days, what would you do differently?</a:t>
+            </a:r>
+            <a:endParaRPr lang="en-US" sz="1300" dirty="0"/>
+          </a:p>
+        </p:txBody>
+      </p:sp>
+      <p:sp>
+        <p:nvSpPr>
+          <p:cNvPr id="14" name="Text 12"/>
           <p:cNvSpPr/>
           <p:nvPr/>
         </p:nvSpPr>
